--- a/ppt/out/WLC2급_제10강_가족소통·생명윤리와갈등중재.pptx
+++ b/ppt/out/WLC2급_제10강_가족소통·생명윤리와갈등중재.pptx
@@ -157,7 +157,7 @@
   <p:extLst>
     <p:ext uri="{521415D9-36F7-43E2-AB2F-B90AF26B5E84}">
       <p14:sectionLst xmlns:p14="http://schemas.microsoft.com/office/powerpoint/2010/main">
-        <p14:section name="열기" id="{171d7eba-4a38-db20-6474-49e0d65d58b2}">
+        <p14:section name="열기" id="{68d5306f-b019-45de-b5a5-0dd3e988476e}">
           <p14:sldIdLst>
             <p14:sldId id="256"/>
             <p14:sldId id="257"/>
@@ -170,7 +170,7 @@
             <p14:sldId id="264"/>
           </p14:sldIdLst>
         </p14:section>
-        <p14:section name="1교시 듣고 말하는 기술" id="{8341e163-97be-3c94-2c7c-f0b758c16c76}">
+        <p14:section name="1교시 듣고 말하는 기술" id="{98dea166-fe71-28cd-d514-e7f5fb8802be}">
           <p14:sldIdLst>
             <p14:sldId id="265"/>
             <p14:sldId id="266"/>
@@ -182,7 +182,7 @@
             <p14:sldId id="272"/>
           </p14:sldIdLst>
         </p14:section>
-        <p14:section name="2교시 생명윤리와 중재의 원칙" id="{768d6c47-d470-5114-622b-20201da243bc}">
+        <p14:section name="2교시 생명윤리와 중재의 원칙" id="{cab7f9ee-d997-fc69-de3e-e61691d0f51b}">
           <p14:sldIdLst>
             <p14:sldId id="273"/>
             <p14:sldId id="274"/>
@@ -198,7 +198,7 @@
             <p14:sldId id="284"/>
           </p14:sldIdLst>
         </p14:section>
-        <p14:section name="3교시 가족회의를 촉진하다" id="{42f2d49a-5cfc-a580-ec05-4d834cebd999}">
+        <p14:section name="3교시 가족회의를 촉진하다" id="{a4d5ef8e-745e-028f-a171-1906f3e39164}">
           <p14:sldIdLst>
             <p14:sldId id="285"/>
             <p14:sldId id="286"/>
@@ -218,7 +218,7 @@
             <p14:sldId id="300"/>
           </p14:sldIdLst>
         </p14:section>
-        <p14:section name="정리와 예고" id="{9ff8864e-b391-e638-f4f0-7ff1ed0abe01}">
+        <p14:section name="정리와 예고" id="{c35b0126-0480-a6b3-3f4c-b3f520af151f}">
           <p14:sldIdLst>
             <p14:sldId id="301"/>
             <p14:sldId id="302"/>
@@ -6291,7 +6291,7 @@
         <p:spPr>
           <a:xfrm>
             <a:off x="548640" y="2560320"/>
-            <a:ext cx="9144000" cy="1097280"/>
+            <a:ext cx="10607040" cy="1097280"/>
           </a:xfrm>
           <a:prstGeom prst="rect">
             <a:avLst/>
@@ -50299,47 +50299,47 @@
 </file>
 
 <file path=ppt/theme/theme1.xml><?xml version="1.0" encoding="utf-8"?>
-<a:theme xmlns:a="http://schemas.openxmlformats.org/drawingml/2006/main" name="WLC Teal">
+<a:theme xmlns:a="http://schemas.openxmlformats.org/drawingml/2006/main" name="Office Theme">
   <a:themeElements>
-    <a:clrScheme name="WLC Teal">
+    <a:clrScheme name="Office">
       <a:dk1>
-        <a:srgbClr val="222222"/>
+        <a:sysClr val="windowText" lastClr="000000"/>
       </a:dk1>
       <a:lt1>
-        <a:srgbClr val="FFFFFF"/>
+        <a:sysClr val="window" lastClr="FFFFFF"/>
       </a:lt1>
       <a:dk2>
-        <a:srgbClr val="1F4E4A"/>
+        <a:srgbClr val="44546A"/>
       </a:dk2>
       <a:lt2>
-        <a:srgbClr val="EAF3F0"/>
+        <a:srgbClr val="E7E6E6"/>
       </a:lt2>
       <a:accent1>
-        <a:srgbClr val="2E7D6B"/>
+        <a:srgbClr val="4472C4"/>
       </a:accent1>
       <a:accent2>
-        <a:srgbClr val="D98E04"/>
+        <a:srgbClr val="ED7D31"/>
       </a:accent2>
       <a:accent3>
-        <a:srgbClr val="3A6EA5"/>
+        <a:srgbClr val="A5A5A5"/>
       </a:accent3>
       <a:accent4>
-        <a:srgbClr val="B5452F"/>
+        <a:srgbClr val="FFC000"/>
       </a:accent4>
       <a:accent5>
-        <a:srgbClr val="8FB9A8"/>
+        <a:srgbClr val="5B9BD5"/>
       </a:accent5>
       <a:accent6>
-        <a:srgbClr val="6B6B6B"/>
+        <a:srgbClr val="70AD47"/>
       </a:accent6>
       <a:hlink>
-        <a:srgbClr val="3A6EA5"/>
+        <a:srgbClr val="0563C1"/>
       </a:hlink>
       <a:folHlink>
-        <a:srgbClr val="1F4E4A"/>
+        <a:srgbClr val="954F72"/>
       </a:folHlink>
     </a:clrScheme>
-    <a:fontScheme name="WLC Teal">
+    <a:fontScheme name="Office">
       <a:majorFont>
         <a:latin typeface="Noto Serif KR Black"/>
         <a:ea typeface=""/>

--- a/ppt/out/WLC2급_제10강_가족소통·생명윤리와갈등중재.pptx
+++ b/ppt/out/WLC2급_제10강_가족소통·생명윤리와갈등중재.pptx
@@ -157,7 +157,7 @@
   <p:extLst>
     <p:ext uri="{521415D9-36F7-43E2-AB2F-B90AF26B5E84}">
       <p14:sectionLst xmlns:p14="http://schemas.microsoft.com/office/powerpoint/2010/main">
-        <p14:section name="열기" id="{68d5306f-b019-45de-b5a5-0dd3e988476e}">
+        <p14:section name="열기" id="{01fe14d2-17b2-46c6-cde2-a3b4082c64f1}">
           <p14:sldIdLst>
             <p14:sldId id="256"/>
             <p14:sldId id="257"/>
@@ -170,7 +170,7 @@
             <p14:sldId id="264"/>
           </p14:sldIdLst>
         </p14:section>
-        <p14:section name="1교시 듣고 말하는 기술" id="{98dea166-fe71-28cd-d514-e7f5fb8802be}">
+        <p14:section name="1교시 듣고 말하는 기술" id="{a07a83d9-5d78-2846-a84f-4045290423c8}">
           <p14:sldIdLst>
             <p14:sldId id="265"/>
             <p14:sldId id="266"/>
@@ -182,7 +182,7 @@
             <p14:sldId id="272"/>
           </p14:sldIdLst>
         </p14:section>
-        <p14:section name="2교시 생명윤리와 중재의 원칙" id="{cab7f9ee-d997-fc69-de3e-e61691d0f51b}">
+        <p14:section name="2교시 생명윤리와 중재의 원칙" id="{3f88d195-3950-808b-6810-1386efa2cf10}">
           <p14:sldIdLst>
             <p14:sldId id="273"/>
             <p14:sldId id="274"/>
@@ -198,7 +198,7 @@
             <p14:sldId id="284"/>
           </p14:sldIdLst>
         </p14:section>
-        <p14:section name="3교시 가족회의를 촉진하다" id="{a4d5ef8e-745e-028f-a171-1906f3e39164}">
+        <p14:section name="3교시 가족회의를 촉진하다" id="{ecabf916-5438-5e9d-5091-e3883ab716c8}">
           <p14:sldIdLst>
             <p14:sldId id="285"/>
             <p14:sldId id="286"/>
@@ -218,7 +218,7 @@
             <p14:sldId id="300"/>
           </p14:sldIdLst>
         </p14:section>
-        <p14:section name="정리와 예고" id="{c35b0126-0480-a6b3-3f4c-b3f520af151f}">
+        <p14:section name="정리와 예고" id="{1696ea51-017e-7a88-6b24-198c7ca5f208}">
           <p14:sldIdLst>
             <p14:sldId id="301"/>
             <p14:sldId id="302"/>
@@ -50299,47 +50299,47 @@
 </file>
 
 <file path=ppt/theme/theme1.xml><?xml version="1.0" encoding="utf-8"?>
-<a:theme xmlns:a="http://schemas.openxmlformats.org/drawingml/2006/main" name="Office Theme">
+<a:theme xmlns:a="http://schemas.openxmlformats.org/drawingml/2006/main" name="WLC Teal">
   <a:themeElements>
-    <a:clrScheme name="Office">
+    <a:clrScheme name="WLC Teal">
       <a:dk1>
-        <a:sysClr val="windowText" lastClr="000000"/>
+        <a:srgbClr val="222222"/>
       </a:dk1>
       <a:lt1>
-        <a:sysClr val="window" lastClr="FFFFFF"/>
+        <a:srgbClr val="FFFFFF"/>
       </a:lt1>
       <a:dk2>
-        <a:srgbClr val="44546A"/>
+        <a:srgbClr val="1F4E4A"/>
       </a:dk2>
       <a:lt2>
-        <a:srgbClr val="E7E6E6"/>
+        <a:srgbClr val="EAF3F0"/>
       </a:lt2>
       <a:accent1>
-        <a:srgbClr val="4472C4"/>
+        <a:srgbClr val="2E7D6B"/>
       </a:accent1>
       <a:accent2>
-        <a:srgbClr val="ED7D31"/>
+        <a:srgbClr val="D98E04"/>
       </a:accent2>
       <a:accent3>
-        <a:srgbClr val="A5A5A5"/>
+        <a:srgbClr val="3A6EA5"/>
       </a:accent3>
       <a:accent4>
-        <a:srgbClr val="FFC000"/>
+        <a:srgbClr val="B5452F"/>
       </a:accent4>
       <a:accent5>
-        <a:srgbClr val="5B9BD5"/>
+        <a:srgbClr val="8FB9A8"/>
       </a:accent5>
       <a:accent6>
-        <a:srgbClr val="70AD47"/>
+        <a:srgbClr val="6B6B6B"/>
       </a:accent6>
       <a:hlink>
-        <a:srgbClr val="0563C1"/>
+        <a:srgbClr val="3A6EA5"/>
       </a:hlink>
       <a:folHlink>
-        <a:srgbClr val="954F72"/>
+        <a:srgbClr val="1F4E4A"/>
       </a:folHlink>
     </a:clrScheme>
-    <a:fontScheme name="Office">
+    <a:fontScheme name="WLC Teal">
       <a:majorFont>
         <a:latin typeface="Noto Serif KR Black"/>
         <a:ea typeface=""/>
